--- a/outputs/weekly_presentation/03b_GPR_rebar_inversion.pptx
+++ b/outputs/weekly_presentation/03b_GPR_rebar_inversion.pptx
@@ -161,12 +161,6 @@
             <c:idx val="0"/>
             <c:invertIfNegative val="0"/>
             <c:bubble3D val="0"/>
-            <c:spPr>
-              <a:solidFill>
-                <a:srgbClr val="2C7A4B"/>
-              </a:solidFill>
-              <a:effectLst/>
-            </c:spPr>
             <c:extLst>
               <c:ext xmlns:c16="http://schemas.microsoft.com/office/drawing/2014/chart" uri="{C3380CC4-5D6E-409C-BE32-E72D297353CC}">
                 <c16:uniqueId val="{00000001-4295-7E40-ABD9-77A7F64B96F9}"/>
@@ -177,12 +171,6 @@
             <c:idx val="1"/>
             <c:invertIfNegative val="0"/>
             <c:bubble3D val="0"/>
-            <c:spPr>
-              <a:solidFill>
-                <a:srgbClr val="2C7A4B"/>
-              </a:solidFill>
-              <a:effectLst/>
-            </c:spPr>
             <c:extLst>
               <c:ext xmlns:c16="http://schemas.microsoft.com/office/drawing/2014/chart" uri="{C3380CC4-5D6E-409C-BE32-E72D297353CC}">
                 <c16:uniqueId val="{00000003-4295-7E40-ABD9-77A7F64B96F9}"/>
